--- a/docs/TAXONOMY_REDESIGN.pptx
+++ b/docs/TAXONOMY_REDESIGN.pptx
@@ -40,6 +40,8 @@
     <p:sldId id="288" r:id="rId39"/>
     <p:sldId id="289" r:id="rId40"/>
     <p:sldId id="290" r:id="rId41"/>
+    <p:sldId id="291" r:id="rId42"/>
+    <p:sldId id="292" r:id="rId43"/>
   </p:sldIdLst>
   <p:sldSz cx="12191695" cy="6858000" type="screen4x3"/>
   <p:notesSz cx="6858000" cy="9144000"/>
@@ -23964,6 +23966,1393 @@
 </p:sld>
 </file>
 
+<file path=ppt/slides/slide36.xml><?xml version="1.0" encoding="utf-8"?>
+<p:sld xmlns:a="http://schemas.openxmlformats.org/drawingml/2006/main" xmlns:p="http://schemas.openxmlformats.org/presentationml/2006/main" xmlns:r="http://schemas.openxmlformats.org/officeDocument/2006/relationships">
+  <p:cSld>
+    <p:spTree>
+      <p:nvGrpSpPr>
+        <p:cNvPr id="1" name=""/>
+        <p:cNvGrpSpPr/>
+        <p:nvPr/>
+      </p:nvGrpSpPr>
+      <p:grpSpPr/>
+      <p:sp>
+        <p:nvSpPr>
+          <p:cNvPr id="2" name="Rectangle 1"/>
+          <p:cNvSpPr/>
+          <p:nvPr/>
+        </p:nvSpPr>
+        <p:spPr>
+          <a:xfrm>
+            <a:off x="0" y="0"/>
+            <a:ext cx="12191695" cy="6858000"/>
+          </a:xfrm>
+          <a:prstGeom prst="rect">
+            <a:avLst/>
+          </a:prstGeom>
+          <a:solidFill>
+            <a:srgbClr val="FFFFFF"/>
+          </a:solidFill>
+          <a:ln>
+            <a:noFill/>
+          </a:ln>
+          <a:effectLst/>
+        </p:spPr>
+        <p:style>
+          <a:lnRef idx="1">
+            <a:schemeClr val="accent1"/>
+          </a:lnRef>
+          <a:fillRef idx="3">
+            <a:schemeClr val="accent1"/>
+          </a:fillRef>
+          <a:effectRef idx="2">
+            <a:schemeClr val="accent1"/>
+          </a:effectRef>
+          <a:fontRef idx="minor">
+            <a:schemeClr val="lt1"/>
+          </a:fontRef>
+        </p:style>
+        <p:txBody>
+          <a:bodyPr rtlCol="0" anchor="ctr"/>
+          <a:lstStyle/>
+          <a:p>
+            <a:pPr algn="ctr"/>
+          </a:p>
+        </p:txBody>
+      </p:sp>
+      <p:sp>
+        <p:nvSpPr>
+          <p:cNvPr id="3" name="Rectangle 2"/>
+          <p:cNvSpPr/>
+          <p:nvPr/>
+        </p:nvSpPr>
+        <p:spPr>
+          <a:xfrm>
+            <a:off x="0" y="0"/>
+            <a:ext cx="164592" cy="6858000"/>
+          </a:xfrm>
+          <a:prstGeom prst="rect">
+            <a:avLst/>
+          </a:prstGeom>
+          <a:solidFill>
+            <a:srgbClr val="777488"/>
+          </a:solidFill>
+          <a:ln>
+            <a:noFill/>
+          </a:ln>
+          <a:effectLst/>
+        </p:spPr>
+        <p:style>
+          <a:lnRef idx="1">
+            <a:schemeClr val="accent1"/>
+          </a:lnRef>
+          <a:fillRef idx="3">
+            <a:schemeClr val="accent1"/>
+          </a:fillRef>
+          <a:effectRef idx="2">
+            <a:schemeClr val="accent1"/>
+          </a:effectRef>
+          <a:fontRef idx="minor">
+            <a:schemeClr val="lt1"/>
+          </a:fontRef>
+        </p:style>
+        <p:txBody>
+          <a:bodyPr rtlCol="0" anchor="ctr"/>
+          <a:lstStyle/>
+          <a:p>
+            <a:pPr algn="ctr"/>
+          </a:p>
+        </p:txBody>
+      </p:sp>
+      <p:sp>
+        <p:nvSpPr>
+          <p:cNvPr id="4" name="TextBox 3"/>
+          <p:cNvSpPr txBox="1"/>
+          <p:nvPr/>
+        </p:nvSpPr>
+        <p:spPr>
+          <a:xfrm>
+            <a:off x="502920" y="292608"/>
+            <a:ext cx="10424160" cy="365760"/>
+          </a:xfrm>
+          <a:prstGeom prst="rect">
+            <a:avLst/>
+          </a:prstGeom>
+          <a:noFill/>
+        </p:spPr>
+        <p:txBody>
+          <a:bodyPr wrap="square" anchor="t" lIns="45720" rIns="45720" tIns="18288" bIns="18288">
+            <a:spAutoFit/>
+          </a:bodyPr>
+          <a:lstStyle/>
+          <a:p>
+            <a:pPr algn="l">
+              <a:spcBef>
+                <a:spcPts val="0"/>
+              </a:spcBef>
+              <a:spcAft>
+                <a:spcPts val="200"/>
+              </a:spcAft>
+            </a:pPr>
+            <a:r>
+              <a:rPr sz="1200" b="1" i="0">
+                <a:solidFill>
+                  <a:srgbClr val="777488"/>
+                </a:solidFill>
+                <a:latin typeface="Calibri"/>
+              </a:rPr>
+              <a:t>REFERENCES</a:t>
+            </a:r>
+          </a:p>
+        </p:txBody>
+      </p:sp>
+      <p:sp>
+        <p:nvSpPr>
+          <p:cNvPr id="5" name="TextBox 4"/>
+          <p:cNvSpPr txBox="1"/>
+          <p:nvPr/>
+        </p:nvSpPr>
+        <p:spPr>
+          <a:xfrm>
+            <a:off x="502920" y="585216"/>
+            <a:ext cx="10881360" cy="868680"/>
+          </a:xfrm>
+          <a:prstGeom prst="rect">
+            <a:avLst/>
+          </a:prstGeom>
+          <a:noFill/>
+        </p:spPr>
+        <p:txBody>
+          <a:bodyPr wrap="square" anchor="t" lIns="45720" rIns="45720" tIns="18288" bIns="18288">
+            <a:spAutoFit/>
+          </a:bodyPr>
+          <a:lstStyle/>
+          <a:p>
+            <a:pPr algn="l">
+              <a:spcBef>
+                <a:spcPts val="0"/>
+              </a:spcBef>
+              <a:spcAft>
+                <a:spcPts val="0"/>
+              </a:spcAft>
+            </a:pPr>
+            <a:r>
+              <a:rPr sz="2600" b="1" i="0">
+                <a:solidFill>
+                  <a:srgbClr val="1E1B2E"/>
+                </a:solidFill>
+                <a:latin typeface="Calibri"/>
+              </a:rPr>
+              <a:t>Sources &amp; research</a:t>
+            </a:r>
+          </a:p>
+        </p:txBody>
+      </p:sp>
+      <p:sp>
+        <p:nvSpPr>
+          <p:cNvPr id="6" name="Rounded Rectangle 5"/>
+          <p:cNvSpPr/>
+          <p:nvPr/>
+        </p:nvSpPr>
+        <p:spPr>
+          <a:xfrm>
+            <a:off x="11338560" y="310896"/>
+            <a:ext cx="566928" cy="384048"/>
+          </a:xfrm>
+          <a:prstGeom prst="roundRect">
+            <a:avLst/>
+          </a:prstGeom>
+          <a:solidFill>
+            <a:srgbClr val="F4F3FA"/>
+          </a:solidFill>
+          <a:ln>
+            <a:noFill/>
+          </a:ln>
+          <a:effectLst/>
+        </p:spPr>
+        <p:style>
+          <a:lnRef idx="1">
+            <a:schemeClr val="accent1"/>
+          </a:lnRef>
+          <a:fillRef idx="3">
+            <a:schemeClr val="accent1"/>
+          </a:fillRef>
+          <a:effectRef idx="2">
+            <a:schemeClr val="accent1"/>
+          </a:effectRef>
+          <a:fontRef idx="minor">
+            <a:schemeClr val="lt1"/>
+          </a:fontRef>
+        </p:style>
+        <p:txBody>
+          <a:bodyPr rtlCol="0" anchor="ctr"/>
+          <a:lstStyle/>
+          <a:p>
+            <a:pPr algn="ctr"/>
+            <a:r>
+              <a:rPr sz="1200" b="1" i="0">
+                <a:solidFill>
+                  <a:srgbClr val="5B5BE6"/>
+                </a:solidFill>
+                <a:latin typeface="Calibri"/>
+              </a:rPr>
+              <a:t>33</a:t>
+            </a:r>
+          </a:p>
+        </p:txBody>
+      </p:sp>
+      <p:sp>
+        <p:nvSpPr>
+          <p:cNvPr id="7" name="Rectangle 6"/>
+          <p:cNvSpPr/>
+          <p:nvPr/>
+        </p:nvSpPr>
+        <p:spPr>
+          <a:xfrm>
+            <a:off x="502920" y="1335024"/>
+            <a:ext cx="1920240" cy="36576"/>
+          </a:xfrm>
+          <a:prstGeom prst="rect">
+            <a:avLst/>
+          </a:prstGeom>
+          <a:solidFill>
+            <a:srgbClr val="777488"/>
+          </a:solidFill>
+          <a:ln>
+            <a:noFill/>
+          </a:ln>
+          <a:effectLst/>
+        </p:spPr>
+        <p:style>
+          <a:lnRef idx="1">
+            <a:schemeClr val="accent1"/>
+          </a:lnRef>
+          <a:fillRef idx="3">
+            <a:schemeClr val="accent1"/>
+          </a:fillRef>
+          <a:effectRef idx="2">
+            <a:schemeClr val="accent1"/>
+          </a:effectRef>
+          <a:fontRef idx="minor">
+            <a:schemeClr val="lt1"/>
+          </a:fontRef>
+        </p:style>
+        <p:txBody>
+          <a:bodyPr rtlCol="0" anchor="ctr"/>
+          <a:lstStyle/>
+          <a:p>
+            <a:pPr algn="ctr"/>
+          </a:p>
+        </p:txBody>
+      </p:sp>
+      <p:sp>
+        <p:nvSpPr>
+          <p:cNvPr id="8" name="TextBox 7"/>
+          <p:cNvSpPr txBox="1"/>
+          <p:nvPr/>
+        </p:nvSpPr>
+        <p:spPr>
+          <a:xfrm>
+            <a:off x="548640" y="1572768"/>
+            <a:ext cx="5532120" cy="4846320"/>
+          </a:xfrm>
+          <a:prstGeom prst="rect">
+            <a:avLst/>
+          </a:prstGeom>
+          <a:noFill/>
+        </p:spPr>
+        <p:txBody>
+          <a:bodyPr wrap="square" anchor="t" lIns="45720" rIns="45720" tIns="18288" bIns="18288">
+            <a:spAutoFit/>
+          </a:bodyPr>
+          <a:lstStyle/>
+          <a:p>
+            <a:pPr algn="l">
+              <a:spcBef>
+                <a:spcPts val="0"/>
+              </a:spcBef>
+              <a:spcAft>
+                <a:spcPts val="800"/>
+              </a:spcAft>
+            </a:pPr>
+            <a:r>
+              <a:rPr sz="1200" b="1" i="0">
+                <a:solidFill>
+                  <a:srgbClr val="10B7CF"/>
+                </a:solidFill>
+                <a:latin typeface="Calibri"/>
+              </a:rPr>
+              <a:t>PRIMARY — German professional-language framework &amp; exams</a:t>
+            </a:r>
+          </a:p>
+          <a:p>
+            <a:pPr>
+              <a:spcBef>
+                <a:spcPts val="0"/>
+              </a:spcBef>
+              <a:spcAft>
+                <a:spcPts val="700"/>
+              </a:spcAft>
+            </a:pPr>
+            <a:r>
+              <a:rPr sz="1100" b="1" i="0">
+                <a:solidFill>
+                  <a:srgbClr val="777488"/>
+                </a:solidFill>
+                <a:latin typeface="Calibri"/>
+              </a:rPr>
+              <a:t>1  </a:t>
+            </a:r>
+            <a:r>
+              <a:rPr sz="1150" b="1" i="0">
+                <a:solidFill>
+                  <a:srgbClr val="1E1B2E"/>
+                </a:solidFill>
+                <a:latin typeface="Calibri"/>
+              </a:rPr>
+              <a:t>telc Deutsch B1·B2 Beruf — exam overview</a:t>
+            </a:r>
+          </a:p>
+          <a:p>
+            <a:pPr>
+              <a:spcBef>
+                <a:spcPts val="0"/>
+              </a:spcBef>
+              <a:spcAft>
+                <a:spcPts val="900"/>
+              </a:spcAft>
+            </a:pPr>
+            <a:r>
+              <a:rPr sz="1000" b="0" i="0">
+                <a:solidFill>
+                  <a:srgbClr val="777488"/>
+                </a:solidFill>
+                <a:latin typeface="Calibri"/>
+              </a:rPr>
+              <a:t>      </a:t>
+            </a:r>
+            <a:r>
+              <a:rPr sz="950" b="0" i="0" u="sng">
+                <a:solidFill>
+                  <a:srgbClr val="5B5BE6"/>
+                </a:solidFill>
+                <a:latin typeface="Calibri"/>
+                <a:hlinkClick r:id="rId2"/>
+              </a:rPr>
+              <a:t>https://www.telc.net/en/language-examinations/certificate-exams/german/telc-german-b1b2-business/</a:t>
+            </a:r>
+          </a:p>
+          <a:p>
+            <a:pPr>
+              <a:spcBef>
+                <a:spcPts val="0"/>
+              </a:spcBef>
+              <a:spcAft>
+                <a:spcPts val="700"/>
+              </a:spcAft>
+            </a:pPr>
+            <a:r>
+              <a:rPr sz="1100" b="1" i="0">
+                <a:solidFill>
+                  <a:srgbClr val="777488"/>
+                </a:solidFill>
+                <a:latin typeface="Calibri"/>
+              </a:rPr>
+              <a:t>2  </a:t>
+            </a:r>
+            <a:r>
+              <a:rPr sz="1150" b="1" i="0">
+                <a:solidFill>
+                  <a:srgbClr val="1E1B2E"/>
+                </a:solidFill>
+                <a:latin typeface="Calibri"/>
+              </a:rPr>
+              <a:t>telc Deutsch-Test für den Beruf B2</a:t>
+            </a:r>
+          </a:p>
+          <a:p>
+            <a:pPr>
+              <a:spcBef>
+                <a:spcPts val="0"/>
+              </a:spcBef>
+              <a:spcAft>
+                <a:spcPts val="900"/>
+              </a:spcAft>
+            </a:pPr>
+            <a:r>
+              <a:rPr sz="1000" b="0" i="0">
+                <a:solidFill>
+                  <a:srgbClr val="777488"/>
+                </a:solidFill>
+                <a:latin typeface="Calibri"/>
+              </a:rPr>
+              <a:t>      </a:t>
+            </a:r>
+            <a:r>
+              <a:rPr sz="950" b="0" i="0" u="sng">
+                <a:solidFill>
+                  <a:srgbClr val="5B5BE6"/>
+                </a:solidFill>
+                <a:latin typeface="Calibri"/>
+                <a:hlinkClick r:id="rId3"/>
+              </a:rPr>
+              <a:t>https://www.telc.net/en/language-examinations/certificate-exams/german/german-for-business/german-for-business-b2/</a:t>
+            </a:r>
+          </a:p>
+          <a:p>
+            <a:pPr>
+              <a:spcBef>
+                <a:spcPts val="0"/>
+              </a:spcBef>
+              <a:spcAft>
+                <a:spcPts val="700"/>
+              </a:spcAft>
+            </a:pPr>
+            <a:r>
+              <a:rPr sz="1100" b="1" i="0">
+                <a:solidFill>
+                  <a:srgbClr val="777488"/>
+                </a:solidFill>
+                <a:latin typeface="Calibri"/>
+              </a:rPr>
+              <a:t>3  </a:t>
+            </a:r>
+            <a:r>
+              <a:rPr sz="1150" b="1" i="0">
+                <a:solidFill>
+                  <a:srgbClr val="1E1B2E"/>
+                </a:solidFill>
+                <a:latin typeface="Calibri"/>
+              </a:rPr>
+              <a:t>telc Rahmencurriculum &amp; Handbuch Deutsch Pflege B1·B2 (PDF)</a:t>
+            </a:r>
+          </a:p>
+          <a:p>
+            <a:pPr>
+              <a:spcBef>
+                <a:spcPts val="0"/>
+              </a:spcBef>
+              <a:spcAft>
+                <a:spcPts val="900"/>
+              </a:spcAft>
+            </a:pPr>
+            <a:r>
+              <a:rPr sz="1000" b="0" i="0">
+                <a:solidFill>
+                  <a:srgbClr val="777488"/>
+                </a:solidFill>
+                <a:latin typeface="Calibri"/>
+              </a:rPr>
+              <a:t>      </a:t>
+            </a:r>
+            <a:r>
+              <a:rPr sz="950" b="0" i="0" u="sng">
+                <a:solidFill>
+                  <a:srgbClr val="5B5BE6"/>
+                </a:solidFill>
+                <a:latin typeface="Calibri"/>
+                <a:hlinkClick r:id="rId4"/>
+              </a:rPr>
+              <a:t>https://shop.telc.net/media/catalog/product/file/5036B01010201bib.pdf</a:t>
+            </a:r>
+          </a:p>
+          <a:p>
+            <a:pPr>
+              <a:spcBef>
+                <a:spcPts val="0"/>
+              </a:spcBef>
+              <a:spcAft>
+                <a:spcPts val="700"/>
+              </a:spcAft>
+            </a:pPr>
+            <a:r>
+              <a:rPr sz="1100" b="1" i="0">
+                <a:solidFill>
+                  <a:srgbClr val="777488"/>
+                </a:solidFill>
+                <a:latin typeface="Calibri"/>
+              </a:rPr>
+              <a:t>4  </a:t>
+            </a:r>
+            <a:r>
+              <a:rPr sz="1150" b="1" i="0">
+                <a:solidFill>
+                  <a:srgbClr val="1E1B2E"/>
+                </a:solidFill>
+                <a:latin typeface="Calibri"/>
+              </a:rPr>
+              <a:t>BAMF — Berufssprachkurse / DeuFöV (overview)</a:t>
+            </a:r>
+          </a:p>
+          <a:p>
+            <a:pPr>
+              <a:spcBef>
+                <a:spcPts val="0"/>
+              </a:spcBef>
+              <a:spcAft>
+                <a:spcPts val="900"/>
+              </a:spcAft>
+            </a:pPr>
+            <a:r>
+              <a:rPr sz="1000" b="0" i="0">
+                <a:solidFill>
+                  <a:srgbClr val="777488"/>
+                </a:solidFill>
+                <a:latin typeface="Calibri"/>
+              </a:rPr>
+              <a:t>      </a:t>
+            </a:r>
+            <a:r>
+              <a:rPr sz="950" b="0" i="0" u="sng">
+                <a:solidFill>
+                  <a:srgbClr val="5B5BE6"/>
+                </a:solidFill>
+                <a:latin typeface="Calibri"/>
+                <a:hlinkClick r:id="rId5"/>
+              </a:rPr>
+              <a:t>https://www.bamf.de/DE/Themen/Integration/ZugewanderteTeilnehmende/DeutschBeruf/deutsch-beruf.html</a:t>
+            </a:r>
+          </a:p>
+        </p:txBody>
+      </p:sp>
+      <p:sp>
+        <p:nvSpPr>
+          <p:cNvPr id="9" name="TextBox 8"/>
+          <p:cNvSpPr txBox="1"/>
+          <p:nvPr/>
+        </p:nvSpPr>
+        <p:spPr>
+          <a:xfrm>
+            <a:off x="6263640" y="1572768"/>
+            <a:ext cx="5486400" cy="4846320"/>
+          </a:xfrm>
+          <a:prstGeom prst="rect">
+            <a:avLst/>
+          </a:prstGeom>
+          <a:noFill/>
+        </p:spPr>
+        <p:txBody>
+          <a:bodyPr wrap="square" anchor="t" lIns="45720" rIns="45720" tIns="18288" bIns="18288">
+            <a:spAutoFit/>
+          </a:bodyPr>
+          <a:lstStyle/>
+          <a:p>
+            <a:pPr algn="l">
+              <a:spcBef>
+                <a:spcPts val="0"/>
+              </a:spcBef>
+              <a:spcAft>
+                <a:spcPts val="800"/>
+              </a:spcAft>
+            </a:pPr>
+            <a:r>
+              <a:rPr sz="1200" b="1" i="0">
+                <a:solidFill>
+                  <a:srgbClr val="10B7CF"/>
+                </a:solidFill>
+                <a:latin typeface="Calibri"/>
+              </a:rPr>
+              <a:t>PRIMARY (cont.) — sector &amp; curriculum detail</a:t>
+            </a:r>
+          </a:p>
+          <a:p>
+            <a:pPr>
+              <a:spcBef>
+                <a:spcPts val="0"/>
+              </a:spcBef>
+              <a:spcAft>
+                <a:spcPts val="700"/>
+              </a:spcAft>
+            </a:pPr>
+            <a:r>
+              <a:rPr sz="1100" b="1" i="0">
+                <a:solidFill>
+                  <a:srgbClr val="777488"/>
+                </a:solidFill>
+                <a:latin typeface="Calibri"/>
+              </a:rPr>
+              <a:t>5  </a:t>
+            </a:r>
+            <a:r>
+              <a:rPr sz="1150" b="1" i="0">
+                <a:solidFill>
+                  <a:srgbClr val="1E1B2E"/>
+                </a:solidFill>
+                <a:latin typeface="Calibri"/>
+              </a:rPr>
+              <a:t>BAMF — Berufssprachkurse Anerkennung Gesundheitswesen (Pflege)</a:t>
+            </a:r>
+          </a:p>
+          <a:p>
+            <a:pPr>
+              <a:spcBef>
+                <a:spcPts val="0"/>
+              </a:spcBef>
+              <a:spcAft>
+                <a:spcPts val="900"/>
+              </a:spcAft>
+            </a:pPr>
+            <a:r>
+              <a:rPr sz="1000" b="0" i="0">
+                <a:solidFill>
+                  <a:srgbClr val="777488"/>
+                </a:solidFill>
+                <a:latin typeface="Calibri"/>
+              </a:rPr>
+              <a:t>      </a:t>
+            </a:r>
+            <a:r>
+              <a:rPr sz="950" b="0" i="0" u="sng">
+                <a:solidFill>
+                  <a:srgbClr val="5B5BE6"/>
+                </a:solidFill>
+                <a:latin typeface="Calibri"/>
+                <a:hlinkClick r:id="rId6"/>
+              </a:rPr>
+              <a:t>https://www.bamf.de/DE/Themen/Integration/ZugewanderteTeilnehmende/AnerkennungsBSK/anerkennungsbsk-node.html</a:t>
+            </a:r>
+          </a:p>
+          <a:p>
+            <a:pPr>
+              <a:spcBef>
+                <a:spcPts val="0"/>
+              </a:spcBef>
+              <a:spcAft>
+                <a:spcPts val="700"/>
+              </a:spcAft>
+            </a:pPr>
+            <a:r>
+              <a:rPr sz="1100" b="1" i="0">
+                <a:solidFill>
+                  <a:srgbClr val="777488"/>
+                </a:solidFill>
+                <a:latin typeface="Calibri"/>
+              </a:rPr>
+              <a:t>6  </a:t>
+            </a:r>
+            <a:r>
+              <a:rPr sz="1150" b="1" i="0">
+                <a:solidFill>
+                  <a:srgbClr val="1E1B2E"/>
+                </a:solidFill>
+                <a:latin typeface="Calibri"/>
+              </a:rPr>
+              <a:t>BAMF — Konzept „Gesundheitsfachberufe“ (PDF)</a:t>
+            </a:r>
+          </a:p>
+          <a:p>
+            <a:pPr>
+              <a:spcBef>
+                <a:spcPts val="0"/>
+              </a:spcBef>
+              <a:spcAft>
+                <a:spcPts val="900"/>
+              </a:spcAft>
+            </a:pPr>
+            <a:r>
+              <a:rPr sz="1000" b="0" i="0">
+                <a:solidFill>
+                  <a:srgbClr val="777488"/>
+                </a:solidFill>
+                <a:latin typeface="Calibri"/>
+              </a:rPr>
+              <a:t>      </a:t>
+            </a:r>
+            <a:r>
+              <a:rPr sz="950" b="0" i="0" u="sng">
+                <a:solidFill>
+                  <a:srgbClr val="5B5BE6"/>
+                </a:solidFill>
+                <a:latin typeface="Calibri"/>
+                <a:hlinkClick r:id="rId7"/>
+              </a:rPr>
+              <a:t>https://www.bamf.de/SharedDocs/Anlagen/DE/Integration/Berufsbezsprachf-ESF-BAMF/BSK-Konzepte/konzept-nichtakademische-gesundheitsberufe.pdf</a:t>
+            </a:r>
+          </a:p>
+          <a:p>
+            <a:pPr>
+              <a:spcBef>
+                <a:spcPts val="0"/>
+              </a:spcBef>
+              <a:spcAft>
+                <a:spcPts val="700"/>
+              </a:spcAft>
+            </a:pPr>
+            <a:r>
+              <a:rPr sz="1100" b="1" i="0">
+                <a:solidFill>
+                  <a:srgbClr val="777488"/>
+                </a:solidFill>
+                <a:latin typeface="Calibri"/>
+              </a:rPr>
+              <a:t>7  </a:t>
+            </a:r>
+            <a:r>
+              <a:rPr sz="1150" b="1" i="0">
+                <a:solidFill>
+                  <a:srgbClr val="1E1B2E"/>
+                </a:solidFill>
+                <a:latin typeface="Calibri"/>
+              </a:rPr>
+              <a:t>BAMF — Lernzielkatalog Spezial-/Basisberufssprachkurse (PDF)</a:t>
+            </a:r>
+          </a:p>
+          <a:p>
+            <a:pPr>
+              <a:spcBef>
+                <a:spcPts val="0"/>
+              </a:spcBef>
+              <a:spcAft>
+                <a:spcPts val="900"/>
+              </a:spcAft>
+            </a:pPr>
+            <a:r>
+              <a:rPr sz="1000" b="0" i="0">
+                <a:solidFill>
+                  <a:srgbClr val="777488"/>
+                </a:solidFill>
+                <a:latin typeface="Calibri"/>
+              </a:rPr>
+              <a:t>      </a:t>
+            </a:r>
+            <a:r>
+              <a:rPr sz="950" b="0" i="0" u="sng">
+                <a:solidFill>
+                  <a:srgbClr val="5B5BE6"/>
+                </a:solidFill>
+                <a:latin typeface="Calibri"/>
+                <a:hlinkClick r:id="rId8"/>
+              </a:rPr>
+              <a:t>https://www.bamf.de/SharedDocs/Anlagen/DE/Integration/Berufsbezsprachf-ESF-BAMF/BSK-Konzepte/lernzielkatalog-spezial-und-basisberufssprachkurse.pdf</a:t>
+            </a:r>
+          </a:p>
+          <a:p>
+            <a:pPr>
+              <a:spcBef>
+                <a:spcPts val="0"/>
+              </a:spcBef>
+              <a:spcAft>
+                <a:spcPts val="700"/>
+              </a:spcAft>
+            </a:pPr>
+            <a:r>
+              <a:rPr sz="1100" b="1" i="0">
+                <a:solidFill>
+                  <a:srgbClr val="777488"/>
+                </a:solidFill>
+                <a:latin typeface="Calibri"/>
+              </a:rPr>
+              <a:t>8  </a:t>
+            </a:r>
+            <a:r>
+              <a:rPr sz="1150" b="1" i="0">
+                <a:solidFill>
+                  <a:srgbClr val="1E1B2E"/>
+                </a:solidFill>
+                <a:latin typeface="Calibri"/>
+              </a:rPr>
+              <a:t>Council of Europe — CEFR (official framework)</a:t>
+            </a:r>
+          </a:p>
+          <a:p>
+            <a:pPr>
+              <a:spcBef>
+                <a:spcPts val="0"/>
+              </a:spcBef>
+              <a:spcAft>
+                <a:spcPts val="900"/>
+              </a:spcAft>
+            </a:pPr>
+            <a:r>
+              <a:rPr sz="1000" b="0" i="0">
+                <a:solidFill>
+                  <a:srgbClr val="777488"/>
+                </a:solidFill>
+                <a:latin typeface="Calibri"/>
+              </a:rPr>
+              <a:t>      </a:t>
+            </a:r>
+            <a:r>
+              <a:rPr sz="950" b="0" i="0" u="sng">
+                <a:solidFill>
+                  <a:srgbClr val="5B5BE6"/>
+                </a:solidFill>
+                <a:latin typeface="Calibri"/>
+                <a:hlinkClick r:id="rId9"/>
+              </a:rPr>
+              <a:t>https://www.coe.int/en/web/common-european-framework-reference-languages</a:t>
+            </a:r>
+          </a:p>
+        </p:txBody>
+      </p:sp>
+    </p:spTree>
+  </p:cSld>
+  <p:clrMapOvr>
+    <a:masterClrMapping/>
+  </p:clrMapOvr>
+</p:sld>
+</file>
+
+<file path=ppt/slides/slide37.xml><?xml version="1.0" encoding="utf-8"?>
+<p:sld xmlns:a="http://schemas.openxmlformats.org/drawingml/2006/main" xmlns:p="http://schemas.openxmlformats.org/presentationml/2006/main" xmlns:r="http://schemas.openxmlformats.org/officeDocument/2006/relationships">
+  <p:cSld>
+    <p:spTree>
+      <p:nvGrpSpPr>
+        <p:cNvPr id="1" name=""/>
+        <p:cNvGrpSpPr/>
+        <p:nvPr/>
+      </p:nvGrpSpPr>
+      <p:grpSpPr/>
+      <p:sp>
+        <p:nvSpPr>
+          <p:cNvPr id="2" name="Rectangle 1"/>
+          <p:cNvSpPr/>
+          <p:nvPr/>
+        </p:nvSpPr>
+        <p:spPr>
+          <a:xfrm>
+            <a:off x="0" y="0"/>
+            <a:ext cx="12191695" cy="6858000"/>
+          </a:xfrm>
+          <a:prstGeom prst="rect">
+            <a:avLst/>
+          </a:prstGeom>
+          <a:solidFill>
+            <a:srgbClr val="FFFFFF"/>
+          </a:solidFill>
+          <a:ln>
+            <a:noFill/>
+          </a:ln>
+          <a:effectLst/>
+        </p:spPr>
+        <p:style>
+          <a:lnRef idx="1">
+            <a:schemeClr val="accent1"/>
+          </a:lnRef>
+          <a:fillRef idx="3">
+            <a:schemeClr val="accent1"/>
+          </a:fillRef>
+          <a:effectRef idx="2">
+            <a:schemeClr val="accent1"/>
+          </a:effectRef>
+          <a:fontRef idx="minor">
+            <a:schemeClr val="lt1"/>
+          </a:fontRef>
+        </p:style>
+        <p:txBody>
+          <a:bodyPr rtlCol="0" anchor="ctr"/>
+          <a:lstStyle/>
+          <a:p>
+            <a:pPr algn="ctr"/>
+          </a:p>
+        </p:txBody>
+      </p:sp>
+      <p:sp>
+        <p:nvSpPr>
+          <p:cNvPr id="3" name="Rectangle 2"/>
+          <p:cNvSpPr/>
+          <p:nvPr/>
+        </p:nvSpPr>
+        <p:spPr>
+          <a:xfrm>
+            <a:off x="0" y="0"/>
+            <a:ext cx="164592" cy="6858000"/>
+          </a:xfrm>
+          <a:prstGeom prst="rect">
+            <a:avLst/>
+          </a:prstGeom>
+          <a:solidFill>
+            <a:srgbClr val="777488"/>
+          </a:solidFill>
+          <a:ln>
+            <a:noFill/>
+          </a:ln>
+          <a:effectLst/>
+        </p:spPr>
+        <p:style>
+          <a:lnRef idx="1">
+            <a:schemeClr val="accent1"/>
+          </a:lnRef>
+          <a:fillRef idx="3">
+            <a:schemeClr val="accent1"/>
+          </a:fillRef>
+          <a:effectRef idx="2">
+            <a:schemeClr val="accent1"/>
+          </a:effectRef>
+          <a:fontRef idx="minor">
+            <a:schemeClr val="lt1"/>
+          </a:fontRef>
+        </p:style>
+        <p:txBody>
+          <a:bodyPr rtlCol="0" anchor="ctr"/>
+          <a:lstStyle/>
+          <a:p>
+            <a:pPr algn="ctr"/>
+          </a:p>
+        </p:txBody>
+      </p:sp>
+      <p:sp>
+        <p:nvSpPr>
+          <p:cNvPr id="4" name="TextBox 3"/>
+          <p:cNvSpPr txBox="1"/>
+          <p:nvPr/>
+        </p:nvSpPr>
+        <p:spPr>
+          <a:xfrm>
+            <a:off x="502920" y="292608"/>
+            <a:ext cx="10424160" cy="365760"/>
+          </a:xfrm>
+          <a:prstGeom prst="rect">
+            <a:avLst/>
+          </a:prstGeom>
+          <a:noFill/>
+        </p:spPr>
+        <p:txBody>
+          <a:bodyPr wrap="square" anchor="t" lIns="45720" rIns="45720" tIns="18288" bIns="18288">
+            <a:spAutoFit/>
+          </a:bodyPr>
+          <a:lstStyle/>
+          <a:p>
+            <a:pPr algn="l">
+              <a:spcBef>
+                <a:spcPts val="0"/>
+              </a:spcBef>
+              <a:spcAft>
+                <a:spcPts val="200"/>
+              </a:spcAft>
+            </a:pPr>
+            <a:r>
+              <a:rPr sz="1200" b="1" i="0">
+                <a:solidFill>
+                  <a:srgbClr val="777488"/>
+                </a:solidFill>
+                <a:latin typeface="Calibri"/>
+              </a:rPr>
+              <a:t>REFERENCES</a:t>
+            </a:r>
+          </a:p>
+        </p:txBody>
+      </p:sp>
+      <p:sp>
+        <p:nvSpPr>
+          <p:cNvPr id="5" name="TextBox 4"/>
+          <p:cNvSpPr txBox="1"/>
+          <p:nvPr/>
+        </p:nvSpPr>
+        <p:spPr>
+          <a:xfrm>
+            <a:off x="502920" y="585216"/>
+            <a:ext cx="10881360" cy="868680"/>
+          </a:xfrm>
+          <a:prstGeom prst="rect">
+            <a:avLst/>
+          </a:prstGeom>
+          <a:noFill/>
+        </p:spPr>
+        <p:txBody>
+          <a:bodyPr wrap="square" anchor="t" lIns="45720" rIns="45720" tIns="18288" bIns="18288">
+            <a:spAutoFit/>
+          </a:bodyPr>
+          <a:lstStyle/>
+          <a:p>
+            <a:pPr algn="l">
+              <a:spcBef>
+                <a:spcPts val="0"/>
+              </a:spcBef>
+              <a:spcAft>
+                <a:spcPts val="0"/>
+              </a:spcAft>
+            </a:pPr>
+            <a:r>
+              <a:rPr sz="2600" b="1" i="0">
+                <a:solidFill>
+                  <a:srgbClr val="1E1B2E"/>
+                </a:solidFill>
+                <a:latin typeface="Calibri"/>
+              </a:rPr>
+              <a:t>App benchmarks &amp; a note on sourcing</a:t>
+            </a:r>
+          </a:p>
+        </p:txBody>
+      </p:sp>
+      <p:sp>
+        <p:nvSpPr>
+          <p:cNvPr id="6" name="Rounded Rectangle 5"/>
+          <p:cNvSpPr/>
+          <p:nvPr/>
+        </p:nvSpPr>
+        <p:spPr>
+          <a:xfrm>
+            <a:off x="11338560" y="310896"/>
+            <a:ext cx="566928" cy="384048"/>
+          </a:xfrm>
+          <a:prstGeom prst="roundRect">
+            <a:avLst/>
+          </a:prstGeom>
+          <a:solidFill>
+            <a:srgbClr val="F4F3FA"/>
+          </a:solidFill>
+          <a:ln>
+            <a:noFill/>
+          </a:ln>
+          <a:effectLst/>
+        </p:spPr>
+        <p:style>
+          <a:lnRef idx="1">
+            <a:schemeClr val="accent1"/>
+          </a:lnRef>
+          <a:fillRef idx="3">
+            <a:schemeClr val="accent1"/>
+          </a:fillRef>
+          <a:effectRef idx="2">
+            <a:schemeClr val="accent1"/>
+          </a:effectRef>
+          <a:fontRef idx="minor">
+            <a:schemeClr val="lt1"/>
+          </a:fontRef>
+        </p:style>
+        <p:txBody>
+          <a:bodyPr rtlCol="0" anchor="ctr"/>
+          <a:lstStyle/>
+          <a:p>
+            <a:pPr algn="ctr"/>
+            <a:r>
+              <a:rPr sz="1200" b="1" i="0">
+                <a:solidFill>
+                  <a:srgbClr val="5B5BE6"/>
+                </a:solidFill>
+                <a:latin typeface="Calibri"/>
+              </a:rPr>
+              <a:t>34</a:t>
+            </a:r>
+          </a:p>
+        </p:txBody>
+      </p:sp>
+      <p:sp>
+        <p:nvSpPr>
+          <p:cNvPr id="7" name="Rectangle 6"/>
+          <p:cNvSpPr/>
+          <p:nvPr/>
+        </p:nvSpPr>
+        <p:spPr>
+          <a:xfrm>
+            <a:off x="502920" y="1335024"/>
+            <a:ext cx="1920240" cy="36576"/>
+          </a:xfrm>
+          <a:prstGeom prst="rect">
+            <a:avLst/>
+          </a:prstGeom>
+          <a:solidFill>
+            <a:srgbClr val="777488"/>
+          </a:solidFill>
+          <a:ln>
+            <a:noFill/>
+          </a:ln>
+          <a:effectLst/>
+        </p:spPr>
+        <p:style>
+          <a:lnRef idx="1">
+            <a:schemeClr val="accent1"/>
+          </a:lnRef>
+          <a:fillRef idx="3">
+            <a:schemeClr val="accent1"/>
+          </a:fillRef>
+          <a:effectRef idx="2">
+            <a:schemeClr val="accent1"/>
+          </a:effectRef>
+          <a:fontRef idx="minor">
+            <a:schemeClr val="lt1"/>
+          </a:fontRef>
+        </p:style>
+        <p:txBody>
+          <a:bodyPr rtlCol="0" anchor="ctr"/>
+          <a:lstStyle/>
+          <a:p>
+            <a:pPr algn="ctr"/>
+          </a:p>
+        </p:txBody>
+      </p:sp>
+      <p:sp>
+        <p:nvSpPr>
+          <p:cNvPr id="8" name="TextBox 7"/>
+          <p:cNvSpPr txBox="1"/>
+          <p:nvPr/>
+        </p:nvSpPr>
+        <p:spPr>
+          <a:xfrm>
+            <a:off x="548640" y="1572768"/>
+            <a:ext cx="11064240" cy="2011680"/>
+          </a:xfrm>
+          <a:prstGeom prst="rect">
+            <a:avLst/>
+          </a:prstGeom>
+          <a:noFill/>
+        </p:spPr>
+        <p:txBody>
+          <a:bodyPr wrap="square" anchor="t" lIns="45720" rIns="45720" tIns="18288" bIns="18288">
+            <a:spAutoFit/>
+          </a:bodyPr>
+          <a:lstStyle/>
+          <a:p>
+            <a:pPr algn="l">
+              <a:spcBef>
+                <a:spcPts val="0"/>
+              </a:spcBef>
+              <a:spcAft>
+                <a:spcPts val="800"/>
+              </a:spcAft>
+            </a:pPr>
+            <a:r>
+              <a:rPr sz="1200" b="1" i="0">
+                <a:solidFill>
+                  <a:srgbClr val="10B7CF"/>
+                </a:solidFill>
+                <a:latin typeface="Calibri"/>
+              </a:rPr>
+              <a:t>SECONDARY — language-app benchmarks (goal/use-case segmentation)</a:t>
+            </a:r>
+          </a:p>
+          <a:p>
+            <a:pPr>
+              <a:spcBef>
+                <a:spcPts val="0"/>
+              </a:spcBef>
+              <a:spcAft>
+                <a:spcPts val="700"/>
+              </a:spcAft>
+            </a:pPr>
+            <a:r>
+              <a:rPr sz="1100" b="1" i="0">
+                <a:solidFill>
+                  <a:srgbClr val="777488"/>
+                </a:solidFill>
+                <a:latin typeface="Calibri"/>
+              </a:rPr>
+              <a:t>9  </a:t>
+            </a:r>
+            <a:r>
+              <a:rPr sz="1150" b="1" i="0">
+                <a:solidFill>
+                  <a:srgbClr val="1E1B2E"/>
+                </a:solidFill>
+                <a:latin typeface="Calibri"/>
+              </a:rPr>
+              <a:t>Babbel — comparison of best language-learning apps (goal-based)</a:t>
+            </a:r>
+          </a:p>
+          <a:p>
+            <a:pPr>
+              <a:spcBef>
+                <a:spcPts val="0"/>
+              </a:spcBef>
+              <a:spcAft>
+                <a:spcPts val="900"/>
+              </a:spcAft>
+            </a:pPr>
+            <a:r>
+              <a:rPr sz="1000" b="0" i="0">
+                <a:solidFill>
+                  <a:srgbClr val="777488"/>
+                </a:solidFill>
+                <a:latin typeface="Calibri"/>
+              </a:rPr>
+              <a:t>      </a:t>
+            </a:r>
+            <a:r>
+              <a:rPr sz="950" b="0" i="0" u="sng">
+                <a:solidFill>
+                  <a:srgbClr val="5B5BE6"/>
+                </a:solidFill>
+                <a:latin typeface="Calibri"/>
+                <a:hlinkClick r:id="rId2"/>
+              </a:rPr>
+              <a:t>https://www.babbel.com/compare-best-language-learning-apps</a:t>
+            </a:r>
+          </a:p>
+          <a:p>
+            <a:pPr>
+              <a:spcBef>
+                <a:spcPts val="0"/>
+              </a:spcBef>
+              <a:spcAft>
+                <a:spcPts val="700"/>
+              </a:spcAft>
+            </a:pPr>
+            <a:r>
+              <a:rPr sz="1100" b="1" i="0">
+                <a:solidFill>
+                  <a:srgbClr val="777488"/>
+                </a:solidFill>
+                <a:latin typeface="Calibri"/>
+              </a:rPr>
+              <a:t>10  </a:t>
+            </a:r>
+            <a:r>
+              <a:rPr sz="1150" b="1" i="0">
+                <a:solidFill>
+                  <a:srgbClr val="1E1B2E"/>
+                </a:solidFill>
+                <a:latin typeface="Calibri"/>
+              </a:rPr>
+              <a:t>Babbel — apps for travelers / digital nomads (use-case framing)</a:t>
+            </a:r>
+          </a:p>
+          <a:p>
+            <a:pPr>
+              <a:spcBef>
+                <a:spcPts val="0"/>
+              </a:spcBef>
+              <a:spcAft>
+                <a:spcPts val="900"/>
+              </a:spcAft>
+            </a:pPr>
+            <a:r>
+              <a:rPr sz="1000" b="0" i="0">
+                <a:solidFill>
+                  <a:srgbClr val="777488"/>
+                </a:solidFill>
+                <a:latin typeface="Calibri"/>
+              </a:rPr>
+              <a:t>      </a:t>
+            </a:r>
+            <a:r>
+              <a:rPr sz="950" b="0" i="0" u="sng">
+                <a:solidFill>
+                  <a:srgbClr val="5B5BE6"/>
+                </a:solidFill>
+                <a:latin typeface="Calibri"/>
+                <a:hlinkClick r:id="rId3"/>
+              </a:rPr>
+              <a:t>https://www.babbel.com/best-language-learning-apps-for-digital-nomads</a:t>
+            </a:r>
+          </a:p>
+        </p:txBody>
+      </p:sp>
+      <p:sp>
+        <p:nvSpPr>
+          <p:cNvPr id="9" name="Rounded Rectangle 8"/>
+          <p:cNvSpPr/>
+          <p:nvPr/>
+        </p:nvSpPr>
+        <p:spPr>
+          <a:xfrm>
+            <a:off x="548640" y="4114800"/>
+            <a:ext cx="11064240" cy="2377440"/>
+          </a:xfrm>
+          <a:prstGeom prst="roundRect">
+            <a:avLst/>
+          </a:prstGeom>
+          <a:solidFill>
+            <a:srgbClr val="FBF1E2"/>
+          </a:solidFill>
+          <a:ln>
+            <a:noFill/>
+          </a:ln>
+          <a:effectLst/>
+        </p:spPr>
+        <p:style>
+          <a:lnRef idx="1">
+            <a:schemeClr val="accent1"/>
+          </a:lnRef>
+          <a:fillRef idx="3">
+            <a:schemeClr val="accent1"/>
+          </a:fillRef>
+          <a:effectRef idx="2">
+            <a:schemeClr val="accent1"/>
+          </a:effectRef>
+          <a:fontRef idx="minor">
+            <a:schemeClr val="lt1"/>
+          </a:fontRef>
+        </p:style>
+        <p:txBody>
+          <a:bodyPr rtlCol="0" anchor="ctr" wrap="square" lIns="182880" rIns="164592" tIns="118872"/>
+          <a:lstStyle/>
+          <a:p>
+            <a:pPr algn="l">
+              <a:spcBef>
+                <a:spcPts val="0"/>
+              </a:spcBef>
+              <a:spcAft>
+                <a:spcPts val="400"/>
+              </a:spcAft>
+            </a:pPr>
+            <a:r>
+              <a:rPr sz="1400" b="1" i="0">
+                <a:solidFill>
+                  <a:srgbClr val="C06A2A"/>
+                </a:solidFill>
+                <a:latin typeface="Calibri"/>
+              </a:rPr>
+              <a:t>Honesty note on sourcing (so you can weigh the claims)</a:t>
+            </a:r>
+          </a:p>
+          <a:p>
+            <a:pPr algn="l">
+              <a:spcBef>
+                <a:spcPts val="0"/>
+              </a:spcBef>
+              <a:spcAft>
+                <a:spcPts val="300"/>
+              </a:spcAft>
+            </a:pPr>
+            <a:r>
+              <a:rPr sz="1350" b="0" i="0">
+                <a:solidFill>
+                  <a:srgbClr val="444455"/>
+                </a:solidFill>
+                <a:latin typeface="Calibri"/>
+              </a:rPr>
+              <a:t>•  The German-framework and exam claims (Mode, sector, situation, counterpart) are grounded in the primary sources 1–8 above. These are the load-bearing research claims and they hold.</a:t>
+            </a:r>
+          </a:p>
+          <a:p>
+            <a:pPr algn="l">
+              <a:spcBef>
+                <a:spcPts val="0"/>
+              </a:spcBef>
+              <a:spcAft>
+                <a:spcPts val="300"/>
+              </a:spcAft>
+            </a:pPr>
+            <a:r>
+              <a:rPr sz="1350" b="0" i="0">
+                <a:solidFill>
+                  <a:srgbClr val="444455"/>
+                </a:solidFill>
+                <a:latin typeface="Calibri"/>
+              </a:rPr>
+              <a:t>•  The structural descriptions of Duolingo, Busuu, Lingoda and Anki / Memrise (slides 2–3) come from general, current product familiarity, not a single cited page each. They are accurate at a high level but are not citation-grade; treat them as informed characterization.</a:t>
+            </a:r>
+          </a:p>
+          <a:p>
+            <a:pPr algn="l">
+              <a:spcBef>
+                <a:spcPts val="0"/>
+              </a:spcBef>
+              <a:spcAft>
+                <a:spcPts val="300"/>
+              </a:spcAft>
+            </a:pPr>
+            <a:r>
+              <a:rPr sz="1350" b="0" i="0">
+                <a:solidFill>
+                  <a:srgbClr val="444455"/>
+                </a:solidFill>
+                <a:latin typeface="Calibri"/>
+              </a:rPr>
+              <a:t>•  Everything about Genauly's current state is verified directly against the codebase, not the web.</a:t>
+            </a:r>
+          </a:p>
+        </p:txBody>
+      </p:sp>
+    </p:spTree>
+  </p:cSld>
+  <p:clrMapOvr>
+    <a:masterClrMapping/>
+  </p:clrMapOvr>
+</p:sld>
+</file>
+
 <file path=ppt/slides/slide4.xml><?xml version="1.0" encoding="utf-8"?>
 <p:sld xmlns:a="http://schemas.openxmlformats.org/drawingml/2006/main" xmlns:p="http://schemas.openxmlformats.org/presentationml/2006/main" xmlns:r="http://schemas.openxmlformats.org/officeDocument/2006/relationships">
   <p:cSld>
